--- a/m3/diapositivos/sessao-08-m3-f11.pptx
+++ b/m3/diapositivos/sessao-08-m3-f11.pptx
@@ -3222,7 +3222,75 @@
                 <a:ea typeface="Georgia" pitchFamily="34" charset="-122"/>
                 <a:cs typeface="Georgia" pitchFamily="34" charset="-120"/>
               </a:rPr>
-              <a:t>A CPLP instituiu o 5 de maio como Dia da Língua Portuguesa e da Cultura em 2009; em 25 de novembro de 2019, a UNESCO fez dele Dia Mundial, e o português passou a ser a primeira língua com um dia oficial reconhecido por esse organismo. O português é língua oficial de nove países (Angola, Brasil, Cabo Verde, Guiné-Bissau, Guiné Equatorial, Moçambique, Portugal, São Tomé e Príncipe, Timor-Leste) e da Região Administrativa Especial de Macau.</a:t>
+              <a:t>A CPLP instituiu o </a:t>
+            </a:r>
+            <a:pPr indent="0" marL="0">
+              <a:lnSpc>
+                <a:spcPct val="120000"/>
+              </a:lnSpc>
+              <a:buNone/>
+            </a:pPr>
+            <a:r>
+              <a:rPr lang="en-US" sz="2300" b="1" dirty="0">
+                <a:solidFill>
+                  <a:srgbClr val="F2F0EA"/>
+                </a:solidFill>
+                <a:latin typeface="Georgia" pitchFamily="34" charset="0"/>
+                <a:ea typeface="Georgia" pitchFamily="34" charset="-122"/>
+                <a:cs typeface="Georgia" pitchFamily="34" charset="-120"/>
+              </a:rPr>
+              <a:t>5 de maio</a:t>
+            </a:r>
+            <a:pPr indent="0" marL="0">
+              <a:lnSpc>
+                <a:spcPct val="120000"/>
+              </a:lnSpc>
+              <a:buNone/>
+            </a:pPr>
+            <a:r>
+              <a:rPr lang="en-US" sz="2300" dirty="0">
+                <a:solidFill>
+                  <a:srgbClr val="F2F0EA"/>
+                </a:solidFill>
+                <a:latin typeface="Georgia" pitchFamily="34" charset="0"/>
+                <a:ea typeface="Georgia" pitchFamily="34" charset="-122"/>
+                <a:cs typeface="Georgia" pitchFamily="34" charset="-120"/>
+              </a:rPr>
+              <a:t> como Dia da Língua Portuguesa e da Cultura em 2009; em 25 de novembro de 2019, a </a:t>
+            </a:r>
+            <a:pPr indent="0" marL="0">
+              <a:lnSpc>
+                <a:spcPct val="120000"/>
+              </a:lnSpc>
+              <a:buNone/>
+            </a:pPr>
+            <a:r>
+              <a:rPr lang="en-US" sz="2300" b="1" dirty="0">
+                <a:solidFill>
+                  <a:srgbClr val="F2F0EA"/>
+                </a:solidFill>
+                <a:latin typeface="Georgia" pitchFamily="34" charset="0"/>
+                <a:ea typeface="Georgia" pitchFamily="34" charset="-122"/>
+                <a:cs typeface="Georgia" pitchFamily="34" charset="-120"/>
+              </a:rPr>
+              <a:t>UNESCO</a:t>
+            </a:r>
+            <a:pPr indent="0" marL="0">
+              <a:lnSpc>
+                <a:spcPct val="120000"/>
+              </a:lnSpc>
+              <a:buNone/>
+            </a:pPr>
+            <a:r>
+              <a:rPr lang="en-US" sz="2300" dirty="0">
+                <a:solidFill>
+                  <a:srgbClr val="F2F0EA"/>
+                </a:solidFill>
+                <a:latin typeface="Georgia" pitchFamily="34" charset="0"/>
+                <a:ea typeface="Georgia" pitchFamily="34" charset="-122"/>
+                <a:cs typeface="Georgia" pitchFamily="34" charset="-120"/>
+              </a:rPr>
+              <a:t> fez dele Dia Mundial, e o português passou a ser a primeira língua com um dia oficial reconhecido por esse organismo. O português é língua oficial de nove países (Angola, Brasil, Cabo Verde, Guiné-Bissau, Guiné Equatorial, Moçambique, Portugal, São Tomé e Príncipe, Timor-Leste) e da Região Administrativa Especial de Macau.</a:t>
             </a:r>
             <a:endParaRPr lang="en-US" sz="2300" dirty="0"/>
           </a:p>

--- a/m3/diapositivos/sessao-08-m3-f11.pptx
+++ b/m3/diapositivos/sessao-08-m3-f11.pptx
@@ -15,10 +15,9 @@
     <p:sldId id="263" r:id="rId9"/>
     <p:sldId id="264" r:id="rId10"/>
     <p:sldId id="265" r:id="rId11"/>
-    <p:sldId id="266" r:id="rId12"/>
   </p:sldIdLst>
   <p:notesMasterIdLst>
-    <p:notesMasterId r:id="rId13"/>
+    <p:notesMasterId r:id="rId12"/>
   </p:notesMasterIdLst>
   <p:sldSz cx="12192000" cy="6858000"/>
   <p:notesSz cx="6858000" cy="12192000"/>
@@ -1437,629 +1436,6 @@
                 <a:cs typeface="Arial" pitchFamily="34" charset="-120"/>
               </a:rPr>
               <a:t>10</a:t>
-            </a:r>
-            <a:endParaRPr lang="en-US" sz="1000" dirty="0"/>
-          </a:p>
-        </p:txBody>
-      </p:sp>
-      <p:sp>
-        <p:nvSpPr>
-          <p:cNvPr id="6" name="Shape 3"/>
-          <p:cNvSpPr/>
-          <p:nvPr/>
-        </p:nvSpPr>
-        <p:spPr>
-          <a:xfrm>
-            <a:off x="822960" y="502920"/>
-            <a:ext cx="201168" cy="201168"/>
-          </a:xfrm>
-          <a:prstGeom prst="triangle">
-            <a:avLst/>
-          </a:prstGeom>
-          <a:ln w="19050">
-            <a:solidFill>
-              <a:srgbClr val="F2F0EA"/>
-            </a:solidFill>
-            <a:prstDash val="solid"/>
-          </a:ln>
-        </p:spPr>
-      </p:sp>
-      <p:sp>
-        <p:nvSpPr>
-          <p:cNvPr id="7" name="Text 4"/>
-          <p:cNvSpPr/>
-          <p:nvPr/>
-        </p:nvSpPr>
-        <p:spPr>
-          <a:xfrm>
-            <a:off x="1188720" y="457200"/>
-            <a:ext cx="9448495" cy="292608"/>
-          </a:xfrm>
-          <a:prstGeom prst="rect">
-            <a:avLst/>
-          </a:prstGeom>
-          <a:noFill/>
-          <a:ln/>
-        </p:spPr>
-        <p:txBody>
-          <a:bodyPr wrap="square" lIns="0" tIns="0" rIns="0" bIns="0" rtlCol="0" anchor="ctr"/>
-          <a:lstStyle/>
-          <a:p>
-            <a:pPr indent="0" marL="0">
-              <a:buNone/>
-            </a:pPr>
-            <a:r>
-              <a:rPr lang="en-US" sz="1100" b="1" spc="250" kern="0" dirty="0">
-                <a:solidFill>
-                  <a:srgbClr val="A9A79F"/>
-                </a:solidFill>
-                <a:latin typeface="Arial" pitchFamily="34" charset="0"/>
-                <a:ea typeface="Arial" pitchFamily="34" charset="-122"/>
-                <a:cs typeface="Arial" pitchFamily="34" charset="-120"/>
-              </a:rPr>
-              <a:t>SÍNTESE</a:t>
-            </a:r>
-            <a:endParaRPr lang="en-US" sz="1100" dirty="0"/>
-          </a:p>
-        </p:txBody>
-      </p:sp>
-      <p:sp>
-        <p:nvSpPr>
-          <p:cNvPr id="8" name="Text 5"/>
-          <p:cNvSpPr/>
-          <p:nvPr/>
-        </p:nvSpPr>
-        <p:spPr>
-          <a:xfrm>
-            <a:off x="822960" y="868680"/>
-            <a:ext cx="9814255" cy="822960"/>
-          </a:xfrm>
-          <a:prstGeom prst="rect">
-            <a:avLst/>
-          </a:prstGeom>
-          <a:noFill/>
-          <a:ln/>
-        </p:spPr>
-        <p:txBody>
-          <a:bodyPr wrap="square" lIns="0" tIns="0" rIns="0" bIns="0" rtlCol="0" anchor="b">
-            <a:normAutofit/>
-          </a:bodyPr>
-          <a:lstStyle/>
-          <a:p>
-            <a:pPr indent="0" marL="0">
-              <a:buNone/>
-            </a:pPr>
-            <a:r>
-              <a:rPr lang="en-US" sz="3400" dirty="0">
-                <a:solidFill>
-                  <a:srgbClr val="F2F0EA"/>
-                </a:solidFill>
-                <a:latin typeface="Arial" pitchFamily="34" charset="0"/>
-                <a:ea typeface="Arial" pitchFamily="34" charset="-122"/>
-                <a:cs typeface="Arial" pitchFamily="34" charset="-120"/>
-              </a:rPr>
-              <a:t>Para fixar</a:t>
-            </a:r>
-            <a:endParaRPr lang="en-US" sz="3400" dirty="0"/>
-          </a:p>
-        </p:txBody>
-      </p:sp>
-      <p:sp>
-        <p:nvSpPr>
-          <p:cNvPr id="9" name="Shape 6"/>
-          <p:cNvSpPr/>
-          <p:nvPr/>
-        </p:nvSpPr>
-        <p:spPr>
-          <a:xfrm>
-            <a:off x="822960" y="1746504"/>
-            <a:ext cx="640080" cy="64008"/>
-          </a:xfrm>
-          <a:prstGeom prst="rect">
-            <a:avLst/>
-          </a:prstGeom>
-          <a:solidFill>
-            <a:srgbClr val="E4555C"/>
-          </a:solidFill>
-          <a:ln w="12700">
-            <a:solidFill>
-              <a:srgbClr val="E4555C"/>
-            </a:solidFill>
-            <a:prstDash val="solid"/>
-          </a:ln>
-        </p:spPr>
-      </p:sp>
-      <p:sp>
-        <p:nvSpPr>
-          <p:cNvPr id="10" name="Shape 7"/>
-          <p:cNvSpPr/>
-          <p:nvPr/>
-        </p:nvSpPr>
-        <p:spPr>
-          <a:xfrm>
-            <a:off x="1005840" y="2286000"/>
-            <a:ext cx="0" cy="2106676"/>
-          </a:xfrm>
-          <a:prstGeom prst="line">
-            <a:avLst/>
-          </a:prstGeom>
-          <a:noFill/>
-          <a:ln w="12700">
-            <a:solidFill>
-              <a:srgbClr val="A9A79F"/>
-            </a:solidFill>
-            <a:prstDash val="solid"/>
-          </a:ln>
-        </p:spPr>
-      </p:sp>
-      <p:sp>
-        <p:nvSpPr>
-          <p:cNvPr id="11" name="Shape 8"/>
-          <p:cNvSpPr/>
-          <p:nvPr/>
-        </p:nvSpPr>
-        <p:spPr>
-          <a:xfrm>
-            <a:off x="822960" y="2103120"/>
-            <a:ext cx="365760" cy="365760"/>
-          </a:xfrm>
-          <a:prstGeom prst="ellipse">
-            <a:avLst/>
-          </a:prstGeom>
-          <a:solidFill>
-            <a:srgbClr val="111111"/>
-          </a:solidFill>
-          <a:ln w="15875">
-            <a:solidFill>
-              <a:srgbClr val="F2F0EA"/>
-            </a:solidFill>
-            <a:prstDash val="solid"/>
-          </a:ln>
-        </p:spPr>
-      </p:sp>
-      <p:sp>
-        <p:nvSpPr>
-          <p:cNvPr id="12" name="Text 9"/>
-          <p:cNvSpPr/>
-          <p:nvPr/>
-        </p:nvSpPr>
-        <p:spPr>
-          <a:xfrm>
-            <a:off x="822960" y="2103120"/>
-            <a:ext cx="365760" cy="365760"/>
-          </a:xfrm>
-          <a:prstGeom prst="rect">
-            <a:avLst/>
-          </a:prstGeom>
-          <a:noFill/>
-          <a:ln/>
-        </p:spPr>
-        <p:txBody>
-          <a:bodyPr wrap="square" lIns="0" tIns="0" rIns="0" bIns="0" rtlCol="0" anchor="ctr"/>
-          <a:lstStyle/>
-          <a:p>
-            <a:pPr algn="ctr" indent="0" marL="0">
-              <a:buNone/>
-            </a:pPr>
-            <a:r>
-              <a:rPr lang="en-US" sz="1300" b="1" dirty="0">
-                <a:solidFill>
-                  <a:srgbClr val="F2F0EA"/>
-                </a:solidFill>
-                <a:latin typeface="Arial" pitchFamily="34" charset="0"/>
-                <a:ea typeface="Arial" pitchFamily="34" charset="-122"/>
-                <a:cs typeface="Arial" pitchFamily="34" charset="-120"/>
-              </a:rPr>
-              <a:t>1</a:t>
-            </a:r>
-            <a:endParaRPr lang="en-US" sz="1300" dirty="0"/>
-          </a:p>
-        </p:txBody>
-      </p:sp>
-      <p:sp>
-        <p:nvSpPr>
-          <p:cNvPr id="13" name="Text 10"/>
-          <p:cNvSpPr/>
-          <p:nvPr/>
-        </p:nvSpPr>
-        <p:spPr>
-          <a:xfrm>
-            <a:off x="1417320" y="2112264"/>
-            <a:ext cx="9174175" cy="1223772"/>
-          </a:xfrm>
-          <a:prstGeom prst="rect">
-            <a:avLst/>
-          </a:prstGeom>
-          <a:noFill/>
-          <a:ln/>
-        </p:spPr>
-        <p:txBody>
-          <a:bodyPr wrap="square" lIns="0" tIns="0" rIns="0" bIns="0" rtlCol="0" anchor="t">
-            <a:normAutofit/>
-          </a:bodyPr>
-          <a:lstStyle/>
-          <a:p>
-            <a:pPr indent="0" marL="0">
-              <a:lnSpc>
-                <a:spcPct val="105000"/>
-              </a:lnSpc>
-              <a:buNone/>
-            </a:pPr>
-            <a:r>
-              <a:rPr lang="en-US" sz="2200" dirty="0">
-                <a:solidFill>
-                  <a:srgbClr val="F2F0EA"/>
-                </a:solidFill>
-                <a:latin typeface="Arial" pitchFamily="34" charset="0"/>
-                <a:ea typeface="Arial" pitchFamily="34" charset="-122"/>
-                <a:cs typeface="Arial" pitchFamily="34" charset="-120"/>
-              </a:rPr>
-              <a:t>«Autocarro» em Portugal, «ônibus» no Brasil, «machimbombo» em Angola e em Moçambique: a mesma coisa com três nomes; e no Brasil «você» leva o verbo na 3.ª pessoa.</a:t>
-            </a:r>
-            <a:endParaRPr lang="en-US" sz="2200" dirty="0"/>
-          </a:p>
-        </p:txBody>
-      </p:sp>
-      <p:sp>
-        <p:nvSpPr>
-          <p:cNvPr id="14" name="Shape 11"/>
-          <p:cNvSpPr/>
-          <p:nvPr/>
-        </p:nvSpPr>
-        <p:spPr>
-          <a:xfrm>
-            <a:off x="822960" y="3326892"/>
-            <a:ext cx="365760" cy="365760"/>
-          </a:xfrm>
-          <a:prstGeom prst="ellipse">
-            <a:avLst/>
-          </a:prstGeom>
-          <a:solidFill>
-            <a:srgbClr val="111111"/>
-          </a:solidFill>
-          <a:ln w="15875">
-            <a:solidFill>
-              <a:srgbClr val="F2F0EA"/>
-            </a:solidFill>
-            <a:prstDash val="solid"/>
-          </a:ln>
-        </p:spPr>
-      </p:sp>
-      <p:sp>
-        <p:nvSpPr>
-          <p:cNvPr id="15" name="Text 12"/>
-          <p:cNvSpPr/>
-          <p:nvPr/>
-        </p:nvSpPr>
-        <p:spPr>
-          <a:xfrm>
-            <a:off x="822960" y="3326892"/>
-            <a:ext cx="365760" cy="365760"/>
-          </a:xfrm>
-          <a:prstGeom prst="rect">
-            <a:avLst/>
-          </a:prstGeom>
-          <a:noFill/>
-          <a:ln/>
-        </p:spPr>
-        <p:txBody>
-          <a:bodyPr wrap="square" lIns="0" tIns="0" rIns="0" bIns="0" rtlCol="0" anchor="ctr"/>
-          <a:lstStyle/>
-          <a:p>
-            <a:pPr algn="ctr" indent="0" marL="0">
-              <a:buNone/>
-            </a:pPr>
-            <a:r>
-              <a:rPr lang="en-US" sz="1300" b="1" dirty="0">
-                <a:solidFill>
-                  <a:srgbClr val="F2F0EA"/>
-                </a:solidFill>
-                <a:latin typeface="Arial" pitchFamily="34" charset="0"/>
-                <a:ea typeface="Arial" pitchFamily="34" charset="-122"/>
-                <a:cs typeface="Arial" pitchFamily="34" charset="-120"/>
-              </a:rPr>
-              <a:t>2</a:t>
-            </a:r>
-            <a:endParaRPr lang="en-US" sz="1300" dirty="0"/>
-          </a:p>
-        </p:txBody>
-      </p:sp>
-      <p:sp>
-        <p:nvSpPr>
-          <p:cNvPr id="16" name="Text 13"/>
-          <p:cNvSpPr/>
-          <p:nvPr/>
-        </p:nvSpPr>
-        <p:spPr>
-          <a:xfrm>
-            <a:off x="1417320" y="3336036"/>
-            <a:ext cx="9174175" cy="882904"/>
-          </a:xfrm>
-          <a:prstGeom prst="rect">
-            <a:avLst/>
-          </a:prstGeom>
-          <a:noFill/>
-          <a:ln/>
-        </p:spPr>
-        <p:txBody>
-          <a:bodyPr wrap="square" lIns="0" tIns="0" rIns="0" bIns="0" rtlCol="0" anchor="t">
-            <a:normAutofit/>
-          </a:bodyPr>
-          <a:lstStyle/>
-          <a:p>
-            <a:pPr indent="0" marL="0">
-              <a:lnSpc>
-                <a:spcPct val="105000"/>
-              </a:lnSpc>
-              <a:buNone/>
-            </a:pPr>
-            <a:r>
-              <a:rPr lang="en-US" sz="2200" dirty="0">
-                <a:solidFill>
-                  <a:srgbClr val="F2F0EA"/>
-                </a:solidFill>
-                <a:latin typeface="Arial" pitchFamily="34" charset="0"/>
-                <a:ea typeface="Arial" pitchFamily="34" charset="-122"/>
-                <a:cs typeface="Arial" pitchFamily="34" charset="-120"/>
-              </a:rPr>
-              <a:t>O português não vive sozinho: em Cabo Verde fala-se também o crioulo, em Timor-Leste também o tétum.</a:t>
-            </a:r>
-            <a:endParaRPr lang="en-US" sz="2200" dirty="0"/>
-          </a:p>
-        </p:txBody>
-      </p:sp>
-      <p:sp>
-        <p:nvSpPr>
-          <p:cNvPr id="17" name="Shape 14"/>
-          <p:cNvSpPr/>
-          <p:nvPr/>
-        </p:nvSpPr>
-        <p:spPr>
-          <a:xfrm>
-            <a:off x="822960" y="4209796"/>
-            <a:ext cx="365760" cy="365760"/>
-          </a:xfrm>
-          <a:prstGeom prst="ellipse">
-            <a:avLst/>
-          </a:prstGeom>
-          <a:solidFill>
-            <a:srgbClr val="111111"/>
-          </a:solidFill>
-          <a:ln w="15875">
-            <a:solidFill>
-              <a:srgbClr val="F2F0EA"/>
-            </a:solidFill>
-            <a:prstDash val="solid"/>
-          </a:ln>
-        </p:spPr>
-      </p:sp>
-      <p:sp>
-        <p:nvSpPr>
-          <p:cNvPr id="18" name="Text 15"/>
-          <p:cNvSpPr/>
-          <p:nvPr/>
-        </p:nvSpPr>
-        <p:spPr>
-          <a:xfrm>
-            <a:off x="822960" y="4209796"/>
-            <a:ext cx="365760" cy="365760"/>
-          </a:xfrm>
-          <a:prstGeom prst="rect">
-            <a:avLst/>
-          </a:prstGeom>
-          <a:noFill/>
-          <a:ln/>
-        </p:spPr>
-        <p:txBody>
-          <a:bodyPr wrap="square" lIns="0" tIns="0" rIns="0" bIns="0" rtlCol="0" anchor="ctr"/>
-          <a:lstStyle/>
-          <a:p>
-            <a:pPr algn="ctr" indent="0" marL="0">
-              <a:buNone/>
-            </a:pPr>
-            <a:r>
-              <a:rPr lang="en-US" sz="1300" b="1" dirty="0">
-                <a:solidFill>
-                  <a:srgbClr val="F2F0EA"/>
-                </a:solidFill>
-                <a:latin typeface="Arial" pitchFamily="34" charset="0"/>
-                <a:ea typeface="Arial" pitchFamily="34" charset="-122"/>
-                <a:cs typeface="Arial" pitchFamily="34" charset="-120"/>
-              </a:rPr>
-              <a:t>3</a:t>
-            </a:r>
-            <a:endParaRPr lang="en-US" sz="1300" dirty="0"/>
-          </a:p>
-        </p:txBody>
-      </p:sp>
-      <p:sp>
-        <p:nvSpPr>
-          <p:cNvPr id="19" name="Text 16"/>
-          <p:cNvSpPr/>
-          <p:nvPr/>
-        </p:nvSpPr>
-        <p:spPr>
-          <a:xfrm>
-            <a:off x="1417320" y="4218940"/>
-            <a:ext cx="9174175" cy="1223772"/>
-          </a:xfrm>
-          <a:prstGeom prst="rect">
-            <a:avLst/>
-          </a:prstGeom>
-          <a:noFill/>
-          <a:ln/>
-        </p:spPr>
-        <p:txBody>
-          <a:bodyPr wrap="square" lIns="0" tIns="0" rIns="0" bIns="0" rtlCol="0" anchor="t">
-            <a:normAutofit/>
-          </a:bodyPr>
-          <a:lstStyle/>
-          <a:p>
-            <a:pPr indent="0" marL="0">
-              <a:lnSpc>
-                <a:spcPct val="105000"/>
-              </a:lnSpc>
-              <a:buNone/>
-            </a:pPr>
-            <a:r>
-              <a:rPr lang="en-US" sz="2200" dirty="0">
-                <a:solidFill>
-                  <a:srgbClr val="F2F0EA"/>
-                </a:solidFill>
-                <a:latin typeface="Arial" pitchFamily="34" charset="0"/>
-                <a:ea typeface="Arial" pitchFamily="34" charset="-122"/>
-                <a:cs typeface="Arial" pitchFamily="34" charset="-120"/>
-              </a:rPr>
-              <a:t>Esclarecimento, crítica ou pergunta pessoal: a que levas ao público tem até 25 palavras, registo formal, e ensaia-se antes em voz alta.</a:t>
-            </a:r>
-            <a:endParaRPr lang="en-US" sz="2200" dirty="0"/>
-          </a:p>
-        </p:txBody>
-      </p:sp>
-    </p:spTree>
-  </p:cSld>
-  <p:clrMapOvr>
-    <a:masterClrMapping/>
-  </p:clrMapOvr>
-</p:sld>
-</file>
-
-<file path=ppt/slides/slide11.xml><?xml version="1.0" encoding="utf-8"?>
-<p:sld xmlns:a="http://schemas.openxmlformats.org/drawingml/2006/main" xmlns:r="http://schemas.openxmlformats.org/officeDocument/2006/relationships" xmlns:p="http://schemas.openxmlformats.org/presentationml/2006/main">
-  <p:cSld name="Slide 11">
-    <p:bg>
-      <p:bgPr>
-        <a:solidFill>
-          <a:srgbClr val="111111"/>
-        </a:solidFill>
-      </p:bgPr>
-    </p:bg>
-    <p:spTree>
-      <p:nvGrpSpPr>
-        <p:cNvPr id="1" name=""/>
-        <p:cNvGrpSpPr/>
-        <p:nvPr/>
-      </p:nvGrpSpPr>
-      <p:grpSpPr>
-        <a:xfrm>
-          <a:off x="0" y="0"/>
-          <a:ext cx="0" cy="0"/>
-          <a:chOff x="0" y="0"/>
-          <a:chExt cx="0" cy="0"/>
-        </a:xfrm>
-      </p:grpSpPr>
-      <p:sp>
-        <p:nvSpPr>
-          <p:cNvPr id="3" name="Text 0"/>
-          <p:cNvSpPr/>
-          <p:nvPr/>
-        </p:nvSpPr>
-        <p:spPr>
-          <a:xfrm>
-            <a:off x="10637215" y="384048"/>
-            <a:ext cx="731520" cy="365760"/>
-          </a:xfrm>
-          <a:prstGeom prst="rect">
-            <a:avLst/>
-          </a:prstGeom>
-          <a:noFill/>
-          <a:ln/>
-        </p:spPr>
-        <p:txBody>
-          <a:bodyPr wrap="square" lIns="0" tIns="0" rIns="0" bIns="0" rtlCol="0" anchor="ctr"/>
-          <a:lstStyle/>
-          <a:p>
-            <a:pPr algn="r" indent="0" marL="0">
-              <a:buNone/>
-            </a:pPr>
-            <a:r>
-              <a:rPr lang="en-US" sz="1200" b="1" spc="300" kern="0" dirty="0">
-                <a:solidFill>
-                  <a:srgbClr val="A9A79F"/>
-                </a:solidFill>
-                <a:latin typeface="Arial" pitchFamily="34" charset="0"/>
-                <a:ea typeface="Arial" pitchFamily="34" charset="-122"/>
-                <a:cs typeface="Arial" pitchFamily="34" charset="-120"/>
-              </a:rPr>
-              <a:t>EPI</a:t>
-            </a:r>
-            <a:endParaRPr lang="en-US" sz="1200" dirty="0"/>
-          </a:p>
-        </p:txBody>
-      </p:sp>
-      <p:sp>
-        <p:nvSpPr>
-          <p:cNvPr id="4" name="Text 1"/>
-          <p:cNvSpPr/>
-          <p:nvPr/>
-        </p:nvSpPr>
-        <p:spPr>
-          <a:xfrm>
-            <a:off x="822960" y="6400800"/>
-            <a:ext cx="9631375" cy="274320"/>
-          </a:xfrm>
-          <a:prstGeom prst="rect">
-            <a:avLst/>
-          </a:prstGeom>
-          <a:noFill/>
-          <a:ln/>
-        </p:spPr>
-        <p:txBody>
-          <a:bodyPr wrap="square" lIns="0" tIns="0" rIns="0" bIns="0" rtlCol="0" anchor="ctr"/>
-          <a:lstStyle/>
-          <a:p>
-            <a:pPr indent="0" marL="0">
-              <a:buNone/>
-            </a:pPr>
-            <a:r>
-              <a:rPr lang="en-US" sz="1000" dirty="0">
-                <a:solidFill>
-                  <a:srgbClr val="A9A79F"/>
-                </a:solidFill>
-                <a:latin typeface="Arial" pitchFamily="34" charset="0"/>
-                <a:ea typeface="Arial" pitchFamily="34" charset="-122"/>
-                <a:cs typeface="Arial" pitchFamily="34" charset="-120"/>
-              </a:rPr>
-              <a:t>Lição M3-F11, Uma língua, muitos países</a:t>
-            </a:r>
-            <a:endParaRPr lang="en-US" sz="1000" dirty="0"/>
-          </a:p>
-        </p:txBody>
-      </p:sp>
-      <p:sp>
-        <p:nvSpPr>
-          <p:cNvPr id="5" name="Text 2"/>
-          <p:cNvSpPr/>
-          <p:nvPr/>
-        </p:nvSpPr>
-        <p:spPr>
-          <a:xfrm>
-            <a:off x="10637215" y="6400800"/>
-            <a:ext cx="731520" cy="274320"/>
-          </a:xfrm>
-          <a:prstGeom prst="rect">
-            <a:avLst/>
-          </a:prstGeom>
-          <a:noFill/>
-          <a:ln/>
-        </p:spPr>
-        <p:txBody>
-          <a:bodyPr wrap="square" lIns="0" tIns="0" rIns="0" bIns="0" rtlCol="0" anchor="ctr"/>
-          <a:lstStyle/>
-          <a:p>
-            <a:pPr algn="r" indent="0" marL="0">
-              <a:buNone/>
-            </a:pPr>
-            <a:r>
-              <a:rPr lang="en-US" sz="1000" dirty="0">
-                <a:solidFill>
-                  <a:srgbClr val="A9A79F"/>
-                </a:solidFill>
-                <a:latin typeface="Arial" pitchFamily="34" charset="0"/>
-                <a:ea typeface="Arial" pitchFamily="34" charset="-122"/>
-                <a:cs typeface="Arial" pitchFamily="34" charset="-120"/>
-              </a:rPr>
-              <a:t>11</a:t>
             </a:r>
             <a:endParaRPr lang="en-US" sz="1000" dirty="0"/>
           </a:p>
@@ -6679,7 +6055,7 @@
                 <a:ea typeface="Arial" pitchFamily="34" charset="-122"/>
                 <a:cs typeface="Arial" pitchFamily="34" charset="-120"/>
               </a:rPr>
-              <a:t>NO ATLAS LUSÓFONO (OPCIONAL)</a:t>
+              <a:t>SÍNTESE</a:t>
             </a:r>
             <a:endParaRPr lang="en-US" sz="1100" dirty="0"/>
           </a:p>
@@ -6720,7 +6096,7 @@
                 <a:ea typeface="Arial" pitchFamily="34" charset="-122"/>
                 <a:cs typeface="Arial" pitchFamily="34" charset="-120"/>
               </a:rPr>
-              <a:t>Caetano Veloso, Brasil</a:t>
+              <a:t>Para fixar</a:t>
             </a:r>
             <a:endParaRPr lang="en-US" sz="3400" dirty="0"/>
           </a:p>
@@ -6753,14 +6129,101 @@
       </p:sp>
       <p:sp>
         <p:nvSpPr>
-          <p:cNvPr id="10" name="Text 7"/>
-          <p:cNvSpPr/>
-          <p:nvPr/>
-        </p:nvSpPr>
-        <p:spPr>
-          <a:xfrm>
-            <a:off x="822960" y="2057400"/>
-            <a:ext cx="9814255" cy="4023360"/>
+          <p:cNvPr id="10" name="Shape 7"/>
+          <p:cNvSpPr/>
+          <p:nvPr/>
+        </p:nvSpPr>
+        <p:spPr>
+          <a:xfrm>
+            <a:off x="1005840" y="2286000"/>
+            <a:ext cx="0" cy="2106676"/>
+          </a:xfrm>
+          <a:prstGeom prst="line">
+            <a:avLst/>
+          </a:prstGeom>
+          <a:noFill/>
+          <a:ln w="12700">
+            <a:solidFill>
+              <a:srgbClr val="A9A79F"/>
+            </a:solidFill>
+            <a:prstDash val="solid"/>
+          </a:ln>
+        </p:spPr>
+      </p:sp>
+      <p:sp>
+        <p:nvSpPr>
+          <p:cNvPr id="11" name="Shape 8"/>
+          <p:cNvSpPr/>
+          <p:nvPr/>
+        </p:nvSpPr>
+        <p:spPr>
+          <a:xfrm>
+            <a:off x="822960" y="2103120"/>
+            <a:ext cx="365760" cy="365760"/>
+          </a:xfrm>
+          <a:prstGeom prst="ellipse">
+            <a:avLst/>
+          </a:prstGeom>
+          <a:solidFill>
+            <a:srgbClr val="111111"/>
+          </a:solidFill>
+          <a:ln w="15875">
+            <a:solidFill>
+              <a:srgbClr val="F2F0EA"/>
+            </a:solidFill>
+            <a:prstDash val="solid"/>
+          </a:ln>
+        </p:spPr>
+      </p:sp>
+      <p:sp>
+        <p:nvSpPr>
+          <p:cNvPr id="12" name="Text 9"/>
+          <p:cNvSpPr/>
+          <p:nvPr/>
+        </p:nvSpPr>
+        <p:spPr>
+          <a:xfrm>
+            <a:off x="822960" y="2103120"/>
+            <a:ext cx="365760" cy="365760"/>
+          </a:xfrm>
+          <a:prstGeom prst="rect">
+            <a:avLst/>
+          </a:prstGeom>
+          <a:noFill/>
+          <a:ln/>
+        </p:spPr>
+        <p:txBody>
+          <a:bodyPr wrap="square" lIns="0" tIns="0" rIns="0" bIns="0" rtlCol="0" anchor="ctr"/>
+          <a:lstStyle/>
+          <a:p>
+            <a:pPr algn="ctr" indent="0" marL="0">
+              <a:buNone/>
+            </a:pPr>
+            <a:r>
+              <a:rPr lang="en-US" sz="1300" b="1" dirty="0">
+                <a:solidFill>
+                  <a:srgbClr val="F2F0EA"/>
+                </a:solidFill>
+                <a:latin typeface="Arial" pitchFamily="34" charset="0"/>
+                <a:ea typeface="Arial" pitchFamily="34" charset="-122"/>
+                <a:cs typeface="Arial" pitchFamily="34" charset="-120"/>
+              </a:rPr>
+              <a:t>1</a:t>
+            </a:r>
+            <a:endParaRPr lang="en-US" sz="1300" dirty="0"/>
+          </a:p>
+        </p:txBody>
+      </p:sp>
+      <p:sp>
+        <p:nvSpPr>
+          <p:cNvPr id="13" name="Text 10"/>
+          <p:cNvSpPr/>
+          <p:nvPr/>
+        </p:nvSpPr>
+        <p:spPr>
+          <a:xfrm>
+            <a:off x="1417320" y="2112264"/>
+            <a:ext cx="9174175" cy="1223772"/>
           </a:xfrm>
           <a:prstGeom prst="rect">
             <a:avLst/>
@@ -6776,25 +6239,238 @@
           <a:p>
             <a:pPr indent="0" marL="0">
               <a:lnSpc>
-                <a:spcPct val="110000"/>
+                <a:spcPct val="105000"/>
               </a:lnSpc>
-              <a:spcAft>
-                <a:spcPts val="1400"/>
-              </a:spcAft>
-              <a:buNone/>
-            </a:pPr>
-            <a:r>
-              <a:rPr lang="en-US" sz="2800" dirty="0">
+              <a:buNone/>
+            </a:pPr>
+            <a:r>
+              <a:rPr lang="en-US" sz="2200" dirty="0">
                 <a:solidFill>
                   <a:srgbClr val="F2F0EA"/>
                 </a:solidFill>
-                <a:latin typeface="Georgia" pitchFamily="34" charset="0"/>
-                <a:ea typeface="Georgia" pitchFamily="34" charset="-122"/>
-                <a:cs typeface="Georgia" pitchFamily="34" charset="-120"/>
-              </a:rPr>
-              <a:t>Uma língua, muitos países: Caetano canta o português do Brasil e responde a Pessoa. Ouve a canção «Língua» antes da conferência e prepara uma pergunta sobre a língua.</a:t>
-            </a:r>
-            <a:endParaRPr lang="en-US" sz="2800" dirty="0"/>
+                <a:latin typeface="Arial" pitchFamily="34" charset="0"/>
+                <a:ea typeface="Arial" pitchFamily="34" charset="-122"/>
+                <a:cs typeface="Arial" pitchFamily="34" charset="-120"/>
+              </a:rPr>
+              <a:t>«Autocarro» em Portugal, «ônibus» no Brasil, «machimbombo» em Angola e em Moçambique: a mesma coisa com três nomes; e no Brasil «você» leva o verbo na 3.ª pessoa.</a:t>
+            </a:r>
+            <a:endParaRPr lang="en-US" sz="2200" dirty="0"/>
+          </a:p>
+        </p:txBody>
+      </p:sp>
+      <p:sp>
+        <p:nvSpPr>
+          <p:cNvPr id="14" name="Shape 11"/>
+          <p:cNvSpPr/>
+          <p:nvPr/>
+        </p:nvSpPr>
+        <p:spPr>
+          <a:xfrm>
+            <a:off x="822960" y="3326892"/>
+            <a:ext cx="365760" cy="365760"/>
+          </a:xfrm>
+          <a:prstGeom prst="ellipse">
+            <a:avLst/>
+          </a:prstGeom>
+          <a:solidFill>
+            <a:srgbClr val="111111"/>
+          </a:solidFill>
+          <a:ln w="15875">
+            <a:solidFill>
+              <a:srgbClr val="F2F0EA"/>
+            </a:solidFill>
+            <a:prstDash val="solid"/>
+          </a:ln>
+        </p:spPr>
+      </p:sp>
+      <p:sp>
+        <p:nvSpPr>
+          <p:cNvPr id="15" name="Text 12"/>
+          <p:cNvSpPr/>
+          <p:nvPr/>
+        </p:nvSpPr>
+        <p:spPr>
+          <a:xfrm>
+            <a:off x="822960" y="3326892"/>
+            <a:ext cx="365760" cy="365760"/>
+          </a:xfrm>
+          <a:prstGeom prst="rect">
+            <a:avLst/>
+          </a:prstGeom>
+          <a:noFill/>
+          <a:ln/>
+        </p:spPr>
+        <p:txBody>
+          <a:bodyPr wrap="square" lIns="0" tIns="0" rIns="0" bIns="0" rtlCol="0" anchor="ctr"/>
+          <a:lstStyle/>
+          <a:p>
+            <a:pPr algn="ctr" indent="0" marL="0">
+              <a:buNone/>
+            </a:pPr>
+            <a:r>
+              <a:rPr lang="en-US" sz="1300" b="1" dirty="0">
+                <a:solidFill>
+                  <a:srgbClr val="F2F0EA"/>
+                </a:solidFill>
+                <a:latin typeface="Arial" pitchFamily="34" charset="0"/>
+                <a:ea typeface="Arial" pitchFamily="34" charset="-122"/>
+                <a:cs typeface="Arial" pitchFamily="34" charset="-120"/>
+              </a:rPr>
+              <a:t>2</a:t>
+            </a:r>
+            <a:endParaRPr lang="en-US" sz="1300" dirty="0"/>
+          </a:p>
+        </p:txBody>
+      </p:sp>
+      <p:sp>
+        <p:nvSpPr>
+          <p:cNvPr id="16" name="Text 13"/>
+          <p:cNvSpPr/>
+          <p:nvPr/>
+        </p:nvSpPr>
+        <p:spPr>
+          <a:xfrm>
+            <a:off x="1417320" y="3336036"/>
+            <a:ext cx="9174175" cy="882904"/>
+          </a:xfrm>
+          <a:prstGeom prst="rect">
+            <a:avLst/>
+          </a:prstGeom>
+          <a:noFill/>
+          <a:ln/>
+        </p:spPr>
+        <p:txBody>
+          <a:bodyPr wrap="square" lIns="0" tIns="0" rIns="0" bIns="0" rtlCol="0" anchor="t">
+            <a:normAutofit/>
+          </a:bodyPr>
+          <a:lstStyle/>
+          <a:p>
+            <a:pPr indent="0" marL="0">
+              <a:lnSpc>
+                <a:spcPct val="105000"/>
+              </a:lnSpc>
+              <a:buNone/>
+            </a:pPr>
+            <a:r>
+              <a:rPr lang="en-US" sz="2200" dirty="0">
+                <a:solidFill>
+                  <a:srgbClr val="F2F0EA"/>
+                </a:solidFill>
+                <a:latin typeface="Arial" pitchFamily="34" charset="0"/>
+                <a:ea typeface="Arial" pitchFamily="34" charset="-122"/>
+                <a:cs typeface="Arial" pitchFamily="34" charset="-120"/>
+              </a:rPr>
+              <a:t>O português não vive sozinho: em Cabo Verde fala-se também o crioulo, em Timor-Leste também o tétum.</a:t>
+            </a:r>
+            <a:endParaRPr lang="en-US" sz="2200" dirty="0"/>
+          </a:p>
+        </p:txBody>
+      </p:sp>
+      <p:sp>
+        <p:nvSpPr>
+          <p:cNvPr id="17" name="Shape 14"/>
+          <p:cNvSpPr/>
+          <p:nvPr/>
+        </p:nvSpPr>
+        <p:spPr>
+          <a:xfrm>
+            <a:off x="822960" y="4209796"/>
+            <a:ext cx="365760" cy="365760"/>
+          </a:xfrm>
+          <a:prstGeom prst="ellipse">
+            <a:avLst/>
+          </a:prstGeom>
+          <a:solidFill>
+            <a:srgbClr val="111111"/>
+          </a:solidFill>
+          <a:ln w="15875">
+            <a:solidFill>
+              <a:srgbClr val="F2F0EA"/>
+            </a:solidFill>
+            <a:prstDash val="solid"/>
+          </a:ln>
+        </p:spPr>
+      </p:sp>
+      <p:sp>
+        <p:nvSpPr>
+          <p:cNvPr id="18" name="Text 15"/>
+          <p:cNvSpPr/>
+          <p:nvPr/>
+        </p:nvSpPr>
+        <p:spPr>
+          <a:xfrm>
+            <a:off x="822960" y="4209796"/>
+            <a:ext cx="365760" cy="365760"/>
+          </a:xfrm>
+          <a:prstGeom prst="rect">
+            <a:avLst/>
+          </a:prstGeom>
+          <a:noFill/>
+          <a:ln/>
+        </p:spPr>
+        <p:txBody>
+          <a:bodyPr wrap="square" lIns="0" tIns="0" rIns="0" bIns="0" rtlCol="0" anchor="ctr"/>
+          <a:lstStyle/>
+          <a:p>
+            <a:pPr algn="ctr" indent="0" marL="0">
+              <a:buNone/>
+            </a:pPr>
+            <a:r>
+              <a:rPr lang="en-US" sz="1300" b="1" dirty="0">
+                <a:solidFill>
+                  <a:srgbClr val="F2F0EA"/>
+                </a:solidFill>
+                <a:latin typeface="Arial" pitchFamily="34" charset="0"/>
+                <a:ea typeface="Arial" pitchFamily="34" charset="-122"/>
+                <a:cs typeface="Arial" pitchFamily="34" charset="-120"/>
+              </a:rPr>
+              <a:t>3</a:t>
+            </a:r>
+            <a:endParaRPr lang="en-US" sz="1300" dirty="0"/>
+          </a:p>
+        </p:txBody>
+      </p:sp>
+      <p:sp>
+        <p:nvSpPr>
+          <p:cNvPr id="19" name="Text 16"/>
+          <p:cNvSpPr/>
+          <p:nvPr/>
+        </p:nvSpPr>
+        <p:spPr>
+          <a:xfrm>
+            <a:off x="1417320" y="4218940"/>
+            <a:ext cx="9174175" cy="1223772"/>
+          </a:xfrm>
+          <a:prstGeom prst="rect">
+            <a:avLst/>
+          </a:prstGeom>
+          <a:noFill/>
+          <a:ln/>
+        </p:spPr>
+        <p:txBody>
+          <a:bodyPr wrap="square" lIns="0" tIns="0" rIns="0" bIns="0" rtlCol="0" anchor="t">
+            <a:normAutofit/>
+          </a:bodyPr>
+          <a:lstStyle/>
+          <a:p>
+            <a:pPr indent="0" marL="0">
+              <a:lnSpc>
+                <a:spcPct val="105000"/>
+              </a:lnSpc>
+              <a:buNone/>
+            </a:pPr>
+            <a:r>
+              <a:rPr lang="en-US" sz="2200" dirty="0">
+                <a:solidFill>
+                  <a:srgbClr val="F2F0EA"/>
+                </a:solidFill>
+                <a:latin typeface="Arial" pitchFamily="34" charset="0"/>
+                <a:ea typeface="Arial" pitchFamily="34" charset="-122"/>
+                <a:cs typeface="Arial" pitchFamily="34" charset="-120"/>
+              </a:rPr>
+              <a:t>Esclarecimento, crítica ou pergunta pessoal: a que levas ao público tem até 25 palavras, registo formal, e ensaia-se antes em voz alta.</a:t>
+            </a:r>
+            <a:endParaRPr lang="en-US" sz="2200" dirty="0"/>
           </a:p>
         </p:txBody>
       </p:sp>
